--- a/courses/learn_clustering/module01-05-size-constrained-agglomerative/slides.pptx
+++ b/courses/learn_clustering/module01-05-size-constrained-agglomerative/slides.pptx
@@ -515,12 +515,6 @@
               <a:t>Size caps change which merges are legal. You’ll watch greedy agglomeration with capacity two on the tiny graph—and see why A–B–C can no longer form.</a:t>
             </a:r>
           </a:p>
-          <a:p/>
-          <a:p>
-            <a:r>
-              <a:t>&lt;!-- algorithm-walkthrough --&gt;</a:t>
-            </a:r>
-          </a:p>
         </p:txBody>
       </p:sp>
       <p:sp>
@@ -939,12 +933,6 @@
           <a:p>
             <a:r>
               <a:t>Floorplanning and clustering often cap cluster area. Teaching point: constraints change the greedy path — you may never reach the unconstrained communities.</a:t>
-            </a:r>
-          </a:p>
-          <a:p/>
-          <a:p>
-            <a:r>
-              <a:t>&lt;!-- /algorithm-walkthrough --&gt;</a:t>
             </a:r>
           </a:p>
         </p:txBody>
@@ -5771,7 +5759,7 @@
                 <a:spcPts val="2200"/>
               </a:lnSpc>
               <a:spcAft>
-                <a:spcPts val="600"/>
+                <a:spcPts val="400"/>
               </a:spcAft>
             </a:pPr>
             <a:r>
@@ -5790,7 +5778,7 @@
                 <a:spcPts val="2200"/>
               </a:lnSpc>
               <a:spcAft>
-                <a:spcPts val="600"/>
+                <a:spcPts val="400"/>
               </a:spcAft>
             </a:pPr>
             <a:r>
@@ -5800,7 +5788,7 @@
                 </a:solidFill>
                 <a:latin typeface="Consolas"/>
               </a:rPr>
-              <a:t/>
+              <a:t>python ../common/solvers.py examples/tiny_graph.json --k 2</a:t>
             </a:r>
           </a:p>
           <a:p>
@@ -5809,7 +5797,7 @@
                 <a:spcPts val="2200"/>
               </a:lnSpc>
               <a:spcAft>
-                <a:spcPts val="600"/>
+                <a:spcPts val="400"/>
               </a:spcAft>
             </a:pPr>
             <a:r>
@@ -5819,7 +5807,7 @@
                 </a:solidFill>
                 <a:latin typeface="Consolas"/>
               </a:rPr>
-              <a:t>python ../common/solvers.py examples/tiny_graph.json --k 2 --capacity 2</a:t>
+              <a:t>--capacity 2</a:t>
             </a:r>
           </a:p>
         </p:txBody>
